--- a/Team Teserract.pptx
+++ b/Team Teserract.pptx
@@ -1427,7 +1427,7 @@
               </a:spcAft>
               <a:buNone/>
             </a:pPr>
-            <a:endParaRPr/>
+            <a:endParaRPr dirty="0"/>
           </a:p>
         </p:txBody>
       </p:sp>
@@ -12072,7 +12072,7 @@
         </p:nvSpPr>
         <p:spPr>
           <a:xfrm>
-            <a:off x="6880578" y="4235814"/>
+            <a:off x="6753931" y="3239841"/>
             <a:ext cx="3175869" cy="461665"/>
           </a:xfrm>
           <a:prstGeom prst="rect">
@@ -12116,8 +12116,8 @@
         </p:nvSpPr>
         <p:spPr>
           <a:xfrm>
-            <a:off x="6414777" y="4854816"/>
-            <a:ext cx="4839998" cy="4524315"/>
+            <a:off x="6296444" y="3979607"/>
+            <a:ext cx="4839998" cy="5909310"/>
           </a:xfrm>
           <a:prstGeom prst="rect">
             <a:avLst/>
@@ -12221,6 +12221,121 @@
                 </a:solidFill>
               </a:rPr>
               <a:t>3. This guarantees that safety tests are conducted in clean, leak-free environments,  with tamper-proof evidence that complies with the EU AI Act and NIST AI Risk Management Framework.</a:t>
+            </a:r>
+          </a:p>
+          <a:p>
+            <a:endParaRPr lang="en-IN" sz="1800" dirty="0">
+              <a:solidFill>
+                <a:schemeClr val="bg1">
+                  <a:lumMod val="85000"/>
+                </a:schemeClr>
+              </a:solidFill>
+            </a:endParaRPr>
+          </a:p>
+          <a:p>
+            <a:r>
+              <a:rPr lang="en-IN" sz="1800" dirty="0">
+                <a:solidFill>
+                  <a:schemeClr val="bg1">
+                    <a:lumMod val="85000"/>
+                  </a:schemeClr>
+                </a:solidFill>
+              </a:rPr>
+              <a:t>4.</a:t>
+            </a:r>
+            <a:r>
+              <a:rPr lang="en-IN" sz="1800" dirty="0"/>
+              <a:t> </a:t>
+            </a:r>
+            <a:r>
+              <a:rPr lang="en-IN" sz="1800" dirty="0">
+                <a:solidFill>
+                  <a:schemeClr val="bg1">
+                    <a:lumMod val="95000"/>
+                  </a:schemeClr>
+                </a:solidFill>
+              </a:rPr>
+              <a:t>Evaluates LLMs against benchmark datasets (</a:t>
+            </a:r>
+            <a:r>
+              <a:rPr lang="en-IN" sz="1800" b="1" dirty="0" err="1">
+                <a:solidFill>
+                  <a:schemeClr val="bg1">
+                    <a:lumMod val="95000"/>
+                  </a:schemeClr>
+                </a:solidFill>
+              </a:rPr>
+              <a:t>AdvBench</a:t>
+            </a:r>
+            <a:r>
+              <a:rPr lang="en-IN" sz="1800" dirty="0">
+                <a:solidFill>
+                  <a:schemeClr val="bg1">
+                    <a:lumMod val="95000"/>
+                  </a:schemeClr>
+                </a:solidFill>
+              </a:rPr>
+              <a:t>, </a:t>
+            </a:r>
+            <a:r>
+              <a:rPr lang="en-IN" sz="1800" b="1" dirty="0" err="1">
+                <a:solidFill>
+                  <a:schemeClr val="bg1">
+                    <a:lumMod val="95000"/>
+                  </a:schemeClr>
+                </a:solidFill>
+              </a:rPr>
+              <a:t>JailbreakBench</a:t>
+            </a:r>
+            <a:r>
+              <a:rPr lang="en-IN" sz="1800" dirty="0">
+                <a:solidFill>
+                  <a:schemeClr val="bg1">
+                    <a:lumMod val="95000"/>
+                  </a:schemeClr>
+                </a:solidFill>
+              </a:rPr>
+              <a:t>, </a:t>
+            </a:r>
+            <a:r>
+              <a:rPr lang="en-IN" sz="1800" b="1" dirty="0" err="1">
+                <a:solidFill>
+                  <a:schemeClr val="bg1">
+                    <a:lumMod val="95000"/>
+                  </a:schemeClr>
+                </a:solidFill>
+              </a:rPr>
+              <a:t>HarmBench</a:t>
+            </a:r>
+            <a:r>
+              <a:rPr lang="en-IN" sz="1800" dirty="0">
+                <a:solidFill>
+                  <a:schemeClr val="bg1">
+                    <a:lumMod val="95000"/>
+                  </a:schemeClr>
+                </a:solidFill>
+              </a:rPr>
+              <a:t>, </a:t>
+            </a:r>
+            <a:r>
+              <a:rPr lang="en-IN" sz="1800" b="1" dirty="0">
+                <a:solidFill>
+                  <a:schemeClr val="bg1">
+                    <a:lumMod val="95000"/>
+                  </a:schemeClr>
+                </a:solidFill>
+              </a:rPr>
+              <a:t>Lakera Gandalf</a:t>
+            </a:r>
+            <a:r>
+              <a:rPr lang="en-IN" sz="1800" dirty="0">
+                <a:solidFill>
+                  <a:schemeClr val="bg1">
+                    <a:lumMod val="95000"/>
+                  </a:schemeClr>
+                </a:solidFill>
+              </a:rPr>
+              <a:t>) without leaking state across red-blue boundaries</a:t>
             </a:r>
           </a:p>
         </p:txBody>
@@ -12239,7 +12354,7 @@
         </p:nvSpPr>
         <p:spPr>
           <a:xfrm>
-            <a:off x="5554339" y="6362700"/>
+            <a:off x="5398898" y="6248396"/>
             <a:ext cx="711200" cy="254000"/>
           </a:xfrm>
           <a:prstGeom prst="rightArrow">
@@ -12973,8 +13088,8 @@
         </p:nvSpPr>
         <p:spPr>
           <a:xfrm>
-            <a:off x="7555007" y="3366992"/>
-            <a:ext cx="9323294" cy="5909310"/>
+            <a:off x="7555007" y="2961925"/>
+            <a:ext cx="9323294" cy="6463308"/>
           </a:xfrm>
           <a:prstGeom prst="rect">
             <a:avLst/>
@@ -13075,21 +13190,53 @@
             <a:endParaRPr lang="en-IN" sz="1800" dirty="0">
               <a:solidFill>
                 <a:schemeClr val="bg1">
-                  <a:lumMod val="85000"/>
+                  <a:lumMod val="95000"/>
                 </a:schemeClr>
               </a:solidFill>
             </a:endParaRPr>
           </a:p>
           <a:p>
+            <a:pPr lvl="0"/>
             <a:r>
               <a:rPr lang="en-IN" sz="1800" b="1" dirty="0">
                 <a:solidFill>
                   <a:schemeClr val="bg1">
-                    <a:lumMod val="85000"/>
-                  </a:schemeClr>
-                </a:solidFill>
-              </a:rPr>
-              <a:t>2. Four-State Environmental Health Gate (Beyond Naive Pass/Fail)</a:t>
+                    <a:lumMod val="95000"/>
+                  </a:schemeClr>
+                </a:solidFill>
+              </a:rPr>
+              <a:t>2. DARPA Transparent Computing (TC) Provenance:</a:t>
+            </a:r>
+            <a:r>
+              <a:rPr lang="en-IN" sz="1800" dirty="0">
+                <a:solidFill>
+                  <a:schemeClr val="bg1">
+                    <a:lumMod val="95000"/>
+                  </a:schemeClr>
+                </a:solidFill>
+              </a:rPr>
+              <a:t> Generates verifiable, tamper-evident execution provenance receipts (ECDSA P-256 + SHA-256 chains) so safety findings can be reconstructed independently</a:t>
+            </a:r>
+          </a:p>
+          <a:p>
+            <a:br>
+              <a:rPr lang="en-IN" sz="1800" b="1" dirty="0">
+                <a:solidFill>
+                  <a:schemeClr val="bg1">
+                    <a:lumMod val="85000"/>
+                  </a:schemeClr>
+                </a:solidFill>
+              </a:rPr>
+            </a:br>
+            <a:r>
+              <a:rPr lang="en-IN" sz="1800" b="1" dirty="0">
+                <a:solidFill>
+                  <a:schemeClr val="bg1">
+                    <a:lumMod val="85000"/>
+                  </a:schemeClr>
+                </a:solidFill>
+              </a:rPr>
+              <a:t>3. Four-State Environmental Health Gate (Beyond Naive Pass/Fail)</a:t>
             </a:r>
           </a:p>
           <a:p>
@@ -13124,24 +13271,30 @@
                   </a:schemeClr>
                 </a:solidFill>
               </a:rPr>
-              <a:t>3. Active Canary Tripwires for Context Bleeding</a:t>
-            </a:r>
-          </a:p>
-          <a:p>
-            <a:pPr lvl="0"/>
+              <a:t>4</a:t>
+            </a:r>
+            <a:r>
+              <a:rPr lang="en-IN" sz="1800" b="1" dirty="0">
+                <a:solidFill>
+                  <a:schemeClr val="bg1">
+                    <a:lumMod val="95000"/>
+                  </a:schemeClr>
+                </a:solidFill>
+              </a:rPr>
+              <a:t>. Lakera Gandalf &amp; Prompt Leak Containment:</a:t>
+            </a:r>
             <a:r>
               <a:rPr lang="en-IN" sz="1800" dirty="0">
                 <a:solidFill>
                   <a:schemeClr val="bg1">
-                    <a:lumMod val="85000"/>
-                  </a:schemeClr>
-                </a:solidFill>
-              </a:rPr>
-              <a:t>Automatically injects synthetic canary markers into prompt streams. If an LLM echoes or recalls tokens from a previous session due to context bleeding or caching, our tripwire triggers an instant CANARY_BREACH_DETECTED invalidation.</a:t>
-            </a:r>
-          </a:p>
-          <a:p>
-            <a:pPr lvl="0"/>
+                    <a:lumMod val="95000"/>
+                  </a:schemeClr>
+                </a:solidFill>
+              </a:rPr>
+              <a:t> Zero-tolerance canary tripwires instantly flag secret and system-prompt exfiltration before it reaches the model output.</a:t>
+            </a:r>
+          </a:p>
+          <a:p>
             <a:endParaRPr lang="en-IN" sz="1800" dirty="0">
               <a:solidFill>
                 <a:schemeClr val="bg1">
@@ -13159,7 +13312,7 @@
                   </a:schemeClr>
                 </a:solidFill>
               </a:rPr>
-              <a:t>4. Dual-Tenant Blinded Release Vaults</a:t>
+              <a:t>5. Dual-Tenant Blinded Release Vaults</a:t>
             </a:r>
           </a:p>
           <a:p>
@@ -13306,7 +13459,7 @@
         </p:nvSpPr>
         <p:spPr>
           <a:xfrm>
-            <a:off x="8746723" y="2080335"/>
+            <a:off x="8742399" y="1774141"/>
             <a:ext cx="6385384" cy="1700915"/>
           </a:xfrm>
           <a:prstGeom prst="rect">
@@ -17994,7 +18147,7 @@
         <p:spPr>
           <a:xfrm>
             <a:off x="1649350" y="2072345"/>
-            <a:ext cx="14084300" cy="8125301"/>
+            <a:ext cx="14084300" cy="7848302"/>
           </a:xfrm>
           <a:prstGeom prst="rect">
             <a:avLst/>
@@ -18543,11 +18696,6 @@
               </a:rPr>
               <a:t> Instantaneous sub-millisecond process boot times that still catch memory corruption, heap manipulation, and unauthorized subprocesses.</a:t>
             </a:r>
-          </a:p>
-          <a:p>
-            <a:pPr>
-              <a:buNone/>
-            </a:pPr>
             <a:br>
               <a:rPr lang="en-IN" sz="1800" dirty="0">
                 <a:solidFill>
@@ -18560,7 +18708,7 @@
             <a:endParaRPr lang="en-IN" sz="1800" dirty="0">
               <a:solidFill>
                 <a:schemeClr val="bg1">
-                  <a:lumMod val="85000"/>
+                  <a:lumMod val="95000"/>
                 </a:schemeClr>
               </a:solidFill>
             </a:endParaRPr>
@@ -18573,126 +18721,129 @@
               <a:rPr lang="en-IN" sz="1800" b="1" dirty="0">
                 <a:solidFill>
                   <a:schemeClr val="bg1">
-                    <a:lumMod val="85000"/>
-                  </a:schemeClr>
-                </a:solidFill>
-                <a:effectLst/>
-              </a:rPr>
-              <a:t>4. The "Dual Blindness" Paradox: Privacy vs. Verifiability</a:t>
-            </a:r>
-            <a:endParaRPr lang="en-IN" sz="1800" b="1" dirty="0">
+                    <a:lumMod val="95000"/>
+                  </a:schemeClr>
+                </a:solidFill>
+              </a:rPr>
+              <a:t>4. The "Dual Blindness" Problem: Privacy vs. Proof (DAPRA)</a:t>
+            </a:r>
+            <a:endParaRPr lang="en-IN" sz="1800" dirty="0">
               <a:solidFill>
                 <a:schemeClr val="bg1">
-                  <a:lumMod val="85000"/>
+                  <a:lumMod val="95000"/>
                 </a:schemeClr>
               </a:solidFill>
             </a:endParaRPr>
           </a:p>
           <a:p>
-            <a:pPr marL="342900" lvl="0" indent="-342900">
-              <a:buFont typeface="Arial" panose="020B0604020202020204" pitchFamily="34" charset="0"/>
-              <a:buChar char="•"/>
-            </a:pPr>
+            <a:pPr lvl="0"/>
             <a:r>
               <a:rPr lang="en-IN" sz="1800" b="1" dirty="0">
                 <a:solidFill>
                   <a:schemeClr val="bg1">
-                    <a:lumMod val="85000"/>
-                  </a:schemeClr>
-                </a:solidFill>
-                <a:effectLst/>
-              </a:rPr>
-              <a:t>The Challenge:</a:t>
+                    <a:lumMod val="95000"/>
+                  </a:schemeClr>
+                </a:solidFill>
+              </a:rPr>
+              <a:t>     The Challenge: How do you test an AI with secret attack prompts without the model leaking them?</a:t>
+            </a:r>
+          </a:p>
+          <a:p>
+            <a:pPr lvl="0"/>
+            <a:r>
+              <a:rPr lang="en-IN" sz="1800" b="1" dirty="0">
+                <a:solidFill>
+                  <a:schemeClr val="bg1">
+                    <a:lumMod val="95000"/>
+                  </a:schemeClr>
+                </a:solidFill>
+              </a:rPr>
+              <a:t>     The Solution: </a:t>
             </a:r>
             <a:r>
               <a:rPr lang="en-IN" sz="1800" dirty="0">
                 <a:solidFill>
                   <a:schemeClr val="bg1">
-                    <a:lumMod val="85000"/>
-                  </a:schemeClr>
-                </a:solidFill>
-                <a:effectLst/>
-              </a:rPr>
-              <a:t> How do you test an AI model on secret, proprietary benchmark questions without the model exfiltrating the questions, while still proving to judges that the test was authentic?</a:t>
-            </a:r>
-          </a:p>
-          <a:p>
-            <a:pPr marL="342900" lvl="0" indent="-342900">
-              <a:buFont typeface="Arial" panose="020B0604020202020204" pitchFamily="34" charset="0"/>
-              <a:buChar char="•"/>
-            </a:pPr>
+                    <a:lumMod val="95000"/>
+                  </a:schemeClr>
+                </a:solidFill>
+              </a:rPr>
+              <a:t>Dual-Sided Blind Vaults with Canary Tripwires. The AI only sees temporary, isolated references, and canary tokens</a:t>
+            </a:r>
+            <a:br>
+              <a:rPr lang="en-IN" sz="1800" dirty="0">
+                <a:solidFill>
+                  <a:schemeClr val="bg1">
+                    <a:lumMod val="95000"/>
+                  </a:schemeClr>
+                </a:solidFill>
+              </a:rPr>
+            </a:br>
+            <a:r>
+              <a:rPr lang="en-IN" sz="1800" dirty="0">
+                <a:solidFill>
+                  <a:schemeClr val="bg1">
+                    <a:lumMod val="95000"/>
+                  </a:schemeClr>
+                </a:solidFill>
+              </a:rPr>
+              <a:t>      immediately sound an alarm if the model tries to leak secrets (like in Lakera Gandalf attacks).</a:t>
+            </a:r>
+            <a:br>
+              <a:rPr lang="en-IN" sz="1800" dirty="0">
+                <a:solidFill>
+                  <a:schemeClr val="bg1">
+                    <a:lumMod val="95000"/>
+                  </a:schemeClr>
+                </a:solidFill>
+              </a:rPr>
+            </a:br>
+            <a:r>
+              <a:rPr lang="en-IN" sz="1800" dirty="0">
+                <a:solidFill>
+                  <a:schemeClr val="bg1">
+                    <a:lumMod val="95000"/>
+                  </a:schemeClr>
+                </a:solidFill>
+              </a:rPr>
+              <a:t>      </a:t>
+            </a:r>
             <a:r>
               <a:rPr lang="en-IN" sz="1800" b="1" dirty="0">
                 <a:solidFill>
                   <a:schemeClr val="bg1">
-                    <a:lumMod val="85000"/>
-                  </a:schemeClr>
-                </a:solidFill>
-                <a:effectLst/>
-              </a:rPr>
-              <a:t>The Solution:</a:t>
+                    <a:lumMod val="95000"/>
+                  </a:schemeClr>
+                </a:solidFill>
+              </a:rPr>
+              <a:t>Outcome:</a:t>
             </a:r>
             <a:r>
               <a:rPr lang="en-IN" sz="1800" dirty="0">
                 <a:solidFill>
                   <a:schemeClr val="bg1">
-                    <a:lumMod val="85000"/>
-                  </a:schemeClr>
-                </a:solidFill>
-                <a:effectLst/>
-              </a:rPr>
-              <a:t> Engineered </a:t>
-            </a:r>
-            <a:r>
-              <a:rPr lang="en-IN" sz="1800" b="1" dirty="0">
-                <a:solidFill>
-                  <a:schemeClr val="bg1">
-                    <a:lumMod val="85000"/>
-                  </a:schemeClr>
-                </a:solidFill>
-                <a:effectLst/>
-              </a:rPr>
-              <a:t>Dual-Sided Blind Vaults with Scoped Capability Tokens</a:t>
-            </a:r>
-            <a:r>
+                    <a:lumMod val="95000"/>
+                  </a:schemeClr>
+                </a:solidFill>
+              </a:rPr>
+              <a:t> Zero prompt leaks, plus an ECDSA digital receipt proving the test happened without revealing secret data.</a:t>
+            </a:r>
+            <a:br>
               <a:rPr lang="en-IN" sz="1800" dirty="0">
                 <a:solidFill>
                   <a:schemeClr val="bg1">
-                    <a:lumMod val="85000"/>
-                  </a:schemeClr>
-                </a:solidFill>
-                <a:effectLst/>
-              </a:rPr>
-              <a:t>. The code runs against an encrypted memory reference with restricted capability tokens, never exposing raw strings to the model.</a:t>
-            </a:r>
-          </a:p>
-          <a:p>
-            <a:pPr marL="342900" lvl="0" indent="-342900">
-              <a:buFont typeface="Arial" panose="020B0604020202020204" pitchFamily="34" charset="0"/>
-              <a:buChar char="•"/>
-            </a:pPr>
-            <a:r>
-              <a:rPr lang="en-IN" sz="1800" b="1" dirty="0">
-                <a:solidFill>
-                  <a:schemeClr val="bg1">
-                    <a:lumMod val="85000"/>
-                  </a:schemeClr>
-                </a:solidFill>
-                <a:effectLst/>
-              </a:rPr>
-              <a:t>Outcome:</a:t>
-            </a:r>
-            <a:r>
-              <a:rPr lang="en-IN" sz="1800" dirty="0">
-                <a:solidFill>
-                  <a:schemeClr val="bg1">
-                    <a:lumMod val="85000"/>
-                  </a:schemeClr>
-                </a:solidFill>
-                <a:effectLst/>
-              </a:rPr>
-              <a:t> Zero prompt leakage while generating an immutable cryptographic execution receipt.</a:t>
-            </a:r>
+                    <a:lumMod val="95000"/>
+                  </a:schemeClr>
+                </a:solidFill>
+              </a:rPr>
+            </a:br>
+            <a:endParaRPr lang="en-IN" sz="1800" dirty="0">
+              <a:solidFill>
+                <a:schemeClr val="bg1">
+                  <a:lumMod val="95000"/>
+                </a:schemeClr>
+              </a:solidFill>
+            </a:endParaRPr>
           </a:p>
         </p:txBody>
       </p:sp>
@@ -19287,6 +19438,146 @@
           </a:ln>
         </p:spPr>
       </p:pic>
+      <p:sp>
+        <p:nvSpPr>
+          <p:cNvPr id="2" name="TextBox 1">
+            <a:extLst>
+              <a:ext uri="{FF2B5EF4-FFF2-40B4-BE49-F238E27FC236}">
+                <a16:creationId xmlns:a16="http://schemas.microsoft.com/office/drawing/2014/main" id="{4B7BBA23-8A31-B7CF-F414-E976B4E5711C}"/>
+              </a:ext>
+            </a:extLst>
+          </p:cNvPr>
+          <p:cNvSpPr txBox="1"/>
+          <p:nvPr/>
+        </p:nvSpPr>
+        <p:spPr>
+          <a:xfrm>
+            <a:off x="8945880" y="9606643"/>
+            <a:ext cx="9047670" cy="523220"/>
+          </a:xfrm>
+          <a:prstGeom prst="rect">
+            <a:avLst/>
+          </a:prstGeom>
+          <a:noFill/>
+        </p:spPr>
+        <p:txBody>
+          <a:bodyPr wrap="none" rtlCol="0">
+            <a:spAutoFit/>
+          </a:bodyPr>
+          <a:lstStyle/>
+          <a:p>
+            <a:r>
+              <a:rPr lang="en-IN" b="1" dirty="0">
+                <a:solidFill>
+                  <a:schemeClr val="bg1">
+                    <a:lumMod val="95000"/>
+                  </a:schemeClr>
+                </a:solidFill>
+              </a:rPr>
+              <a:t>Benchmarks &amp; Datasets:</a:t>
+            </a:r>
+            <a:r>
+              <a:rPr lang="en-IN" dirty="0">
+                <a:solidFill>
+                  <a:schemeClr val="bg1">
+                    <a:lumMod val="95000"/>
+                  </a:schemeClr>
+                </a:solidFill>
+              </a:rPr>
+              <a:t> </a:t>
+            </a:r>
+            <a:r>
+              <a:rPr lang="en-IN" dirty="0" err="1">
+                <a:solidFill>
+                  <a:schemeClr val="bg1">
+                    <a:lumMod val="95000"/>
+                  </a:schemeClr>
+                </a:solidFill>
+              </a:rPr>
+              <a:t>AdvBench</a:t>
+            </a:r>
+            <a:r>
+              <a:rPr lang="en-IN" dirty="0">
+                <a:solidFill>
+                  <a:schemeClr val="bg1">
+                    <a:lumMod val="95000"/>
+                  </a:schemeClr>
+                </a:solidFill>
+              </a:rPr>
+              <a:t>, </a:t>
+            </a:r>
+            <a:r>
+              <a:rPr lang="en-IN" dirty="0" err="1">
+                <a:solidFill>
+                  <a:schemeClr val="bg1">
+                    <a:lumMod val="95000"/>
+                  </a:schemeClr>
+                </a:solidFill>
+              </a:rPr>
+              <a:t>JailbreakBench</a:t>
+            </a:r>
+            <a:r>
+              <a:rPr lang="en-IN" dirty="0">
+                <a:solidFill>
+                  <a:schemeClr val="bg1">
+                    <a:lumMod val="95000"/>
+                  </a:schemeClr>
+                </a:solidFill>
+              </a:rPr>
+              <a:t>, </a:t>
+            </a:r>
+            <a:r>
+              <a:rPr lang="en-IN" dirty="0" err="1">
+                <a:solidFill>
+                  <a:schemeClr val="bg1">
+                    <a:lumMod val="95000"/>
+                  </a:schemeClr>
+                </a:solidFill>
+              </a:rPr>
+              <a:t>HarmBench</a:t>
+            </a:r>
+            <a:r>
+              <a:rPr lang="en-IN" dirty="0">
+                <a:solidFill>
+                  <a:schemeClr val="bg1">
+                    <a:lumMod val="95000"/>
+                  </a:schemeClr>
+                </a:solidFill>
+              </a:rPr>
+              <a:t>, Lakera Gandalf</a:t>
+            </a:r>
+            <a:br>
+              <a:rPr lang="en-IN" dirty="0">
+                <a:solidFill>
+                  <a:schemeClr val="bg1">
+                    <a:lumMod val="95000"/>
+                  </a:schemeClr>
+                </a:solidFill>
+              </a:rPr>
+            </a:br>
+            <a:r>
+              <a:rPr lang="en-IN" b="1" dirty="0">
+                <a:solidFill>
+                  <a:schemeClr val="bg1">
+                    <a:lumMod val="95000"/>
+                  </a:schemeClr>
+                </a:solidFill>
+              </a:rPr>
+              <a:t>Integrity &amp; Standards:</a:t>
+            </a:r>
+            <a:r>
+              <a:rPr lang="en-IN" dirty="0">
+                <a:solidFill>
+                  <a:schemeClr val="bg1">
+                    <a:lumMod val="95000"/>
+                  </a:schemeClr>
+                </a:solidFill>
+              </a:rPr>
+              <a:t> DARPA TC Provenance, NIST CVE taxonomy, ECDSA P-256 cryptographic verification</a:t>
+            </a:r>
+          </a:p>
+        </p:txBody>
+      </p:sp>
     </p:spTree>
   </p:cSld>
   <p:clrMapOvr>

--- a/Team Teserract.pptx
+++ b/Team Teserract.pptx
@@ -12500,7 +12500,7 @@
         </p:blipFill>
         <p:spPr>
           <a:xfrm>
-            <a:off x="9863507" y="3706300"/>
+            <a:off x="9663097" y="2769928"/>
             <a:ext cx="1357640" cy="1357640"/>
           </a:xfrm>
           <a:prstGeom prst="rect">
@@ -13205,26 +13205,35 @@
                   </a:schemeClr>
                 </a:solidFill>
               </a:rPr>
-              <a:t>2. DARPA Transparent Computing (TC) Provenance:</a:t>
+              <a:t>2.</a:t>
+            </a:r>
+            <a:r>
+              <a:rPr lang="en-IN" sz="1800" b="1" dirty="0">
+                <a:solidFill>
+                  <a:schemeClr val="bg1"/>
+                </a:solidFill>
+              </a:rPr>
+              <a:t> Verifiable Test History (DARPA Provenance):</a:t>
             </a:r>
             <a:r>
               <a:rPr lang="en-IN" sz="1800" dirty="0">
                 <a:solidFill>
-                  <a:schemeClr val="bg1">
-                    <a:lumMod val="95000"/>
-                  </a:schemeClr>
-                </a:solidFill>
-              </a:rPr>
-              <a:t> Generates verifiable, tamper-evident execution provenance receipts (ECDSA P-256 + SHA-256 chains) so safety findings can be reconstructed independently</a:t>
-            </a:r>
-          </a:p>
-          <a:p>
+                  <a:schemeClr val="bg1"/>
+                </a:solidFill>
+              </a:rPr>
+              <a:t> Creates an unbroken digital paper trail sealed with Ed25519 signatures, allowing any judge or auditor to verify and replay the exact test run offline.</a:t>
+            </a:r>
             <a:br>
               <a:rPr lang="en-IN" sz="1800" b="1" dirty="0">
                 <a:solidFill>
-                  <a:schemeClr val="bg1">
-                    <a:lumMod val="85000"/>
-                  </a:schemeClr>
+                  <a:schemeClr val="bg1"/>
+                </a:solidFill>
+              </a:rPr>
+            </a:br>
+            <a:br>
+              <a:rPr lang="en-IN" sz="1800" b="1" dirty="0">
+                <a:solidFill>
+                  <a:schemeClr val="bg1"/>
                 </a:solidFill>
               </a:rPr>
             </a:br>
@@ -15273,7 +15282,7 @@
         <p:spPr>
           <a:xfrm>
             <a:off x="16900763" y="3160303"/>
-            <a:ext cx="1423788" cy="307777"/>
+            <a:ext cx="1324402" cy="307777"/>
           </a:xfrm>
           <a:prstGeom prst="rect">
             <a:avLst/>
@@ -15292,7 +15301,7 @@
                   <a:schemeClr val="bg1"/>
                 </a:solidFill>
               </a:rPr>
-              <a:t>(33ms ~1.8ms)</a:t>
+              <a:t>(33% ~1.8ms)</a:t>
             </a:r>
             <a:endParaRPr lang="en-IN" b="1" dirty="0">
               <a:solidFill>
@@ -16757,6 +16766,104 @@
           </a:prstGeom>
         </p:spPr>
       </p:pic>
+      <p:sp>
+        <p:nvSpPr>
+          <p:cNvPr id="7" name="Rectangle 6">
+            <a:extLst>
+              <a:ext uri="{FF2B5EF4-FFF2-40B4-BE49-F238E27FC236}">
+                <a16:creationId xmlns:a16="http://schemas.microsoft.com/office/drawing/2014/main" id="{0B8C6F3F-DB75-C84B-B2E8-E802A8D62193}"/>
+              </a:ext>
+            </a:extLst>
+          </p:cNvPr>
+          <p:cNvSpPr/>
+          <p:nvPr/>
+        </p:nvSpPr>
+        <p:spPr>
+          <a:xfrm>
+            <a:off x="13980985" y="8799027"/>
+            <a:ext cx="978445" cy="265598"/>
+          </a:xfrm>
+          <a:prstGeom prst="rect">
+            <a:avLst/>
+          </a:prstGeom>
+          <a:solidFill>
+            <a:srgbClr val="C70318"/>
+          </a:solidFill>
+          <a:ln>
+            <a:solidFill>
+              <a:srgbClr val="C70318"/>
+            </a:solidFill>
+          </a:ln>
+        </p:spPr>
+        <p:style>
+          <a:lnRef idx="2">
+            <a:schemeClr val="accent1">
+              <a:shade val="15000"/>
+            </a:schemeClr>
+          </a:lnRef>
+          <a:fillRef idx="1">
+            <a:schemeClr val="accent1"/>
+          </a:fillRef>
+          <a:effectRef idx="0">
+            <a:schemeClr val="accent1"/>
+          </a:effectRef>
+          <a:fontRef idx="minor">
+            <a:schemeClr val="lt1"/>
+          </a:fontRef>
+        </p:style>
+        <p:txBody>
+          <a:bodyPr rtlCol="0" anchor="ctr"/>
+          <a:lstStyle/>
+          <a:p>
+            <a:pPr algn="ctr"/>
+            <a:endParaRPr lang="en-IN" dirty="0"/>
+          </a:p>
+        </p:txBody>
+      </p:sp>
+      <p:sp>
+        <p:nvSpPr>
+          <p:cNvPr id="11" name="TextBox 10">
+            <a:extLst>
+              <a:ext uri="{FF2B5EF4-FFF2-40B4-BE49-F238E27FC236}">
+                <a16:creationId xmlns:a16="http://schemas.microsoft.com/office/drawing/2014/main" id="{27FDC891-BD69-7402-D5CC-78BBEC655A68}"/>
+              </a:ext>
+            </a:extLst>
+          </p:cNvPr>
+          <p:cNvSpPr txBox="1"/>
+          <p:nvPr/>
+        </p:nvSpPr>
+        <p:spPr>
+          <a:xfrm>
+            <a:off x="14108118" y="8705603"/>
+            <a:ext cx="993965" cy="523220"/>
+          </a:xfrm>
+          <a:prstGeom prst="rect">
+            <a:avLst/>
+          </a:prstGeom>
+          <a:noFill/>
+        </p:spPr>
+        <p:txBody>
+          <a:bodyPr wrap="square" rtlCol="0">
+            <a:spAutoFit/>
+          </a:bodyPr>
+          <a:lstStyle/>
+          <a:p>
+            <a:r>
+              <a:rPr lang="en-US" sz="2800" b="1" dirty="0">
+                <a:solidFill>
+                  <a:schemeClr val="bg1"/>
+                </a:solidFill>
+              </a:rPr>
+              <a:t>74%</a:t>
+            </a:r>
+            <a:endParaRPr lang="en-IN" sz="3500" b="1" dirty="0">
+              <a:solidFill>
+                <a:schemeClr val="bg1"/>
+              </a:solidFill>
+            </a:endParaRPr>
+          </a:p>
+        </p:txBody>
+      </p:sp>
     </p:spTree>
   </p:cSld>
   <p:clrMapOvr>
@@ -18725,7 +18832,7 @@
                   </a:schemeClr>
                 </a:solidFill>
               </a:rPr>
-              <a:t>4. The "Dual Blindness" Problem: Privacy vs. Proof (DAPRA)</a:t>
+              <a:t>4. The "Dual Blindness" Problem: Privacy vs. Proof (DARPA)</a:t>
             </a:r>
             <a:endParaRPr lang="en-IN" sz="1800" dirty="0">
               <a:solidFill>
@@ -19452,8 +19559,8 @@
         </p:nvSpPr>
         <p:spPr>
           <a:xfrm>
-            <a:off x="8945880" y="9606643"/>
-            <a:ext cx="9047670" cy="523220"/>
+            <a:off x="7791708" y="9545088"/>
+            <a:ext cx="10328468" cy="584775"/>
           </a:xfrm>
           <a:prstGeom prst="rect">
             <a:avLst/>
@@ -19467,7 +19574,7 @@
           <a:lstStyle/>
           <a:p>
             <a:r>
-              <a:rPr lang="en-IN" b="1" dirty="0">
+              <a:rPr lang="en-IN" sz="1600" b="1" i="1" dirty="0">
                 <a:solidFill>
                   <a:schemeClr val="bg1">
                     <a:lumMod val="95000"/>
@@ -19477,7 +19584,7 @@
               <a:t>Benchmarks &amp; Datasets:</a:t>
             </a:r>
             <a:r>
-              <a:rPr lang="en-IN" dirty="0">
+              <a:rPr lang="en-IN" sz="1600" i="1" dirty="0">
                 <a:solidFill>
                   <a:schemeClr val="bg1">
                     <a:lumMod val="95000"/>
@@ -19487,7 +19594,7 @@
               <a:t> </a:t>
             </a:r>
             <a:r>
-              <a:rPr lang="en-IN" dirty="0" err="1">
+              <a:rPr lang="en-IN" sz="1600" i="1" dirty="0" err="1">
                 <a:solidFill>
                   <a:schemeClr val="bg1">
                     <a:lumMod val="95000"/>
@@ -19497,7 +19604,7 @@
               <a:t>AdvBench</a:t>
             </a:r>
             <a:r>
-              <a:rPr lang="en-IN" dirty="0">
+              <a:rPr lang="en-IN" sz="1600" i="1" dirty="0">
                 <a:solidFill>
                   <a:schemeClr val="bg1">
                     <a:lumMod val="95000"/>
@@ -19507,7 +19614,7 @@
               <a:t>, </a:t>
             </a:r>
             <a:r>
-              <a:rPr lang="en-IN" dirty="0" err="1">
+              <a:rPr lang="en-IN" sz="1600" i="1" dirty="0" err="1">
                 <a:solidFill>
                   <a:schemeClr val="bg1">
                     <a:lumMod val="95000"/>
@@ -19517,7 +19624,7 @@
               <a:t>JailbreakBench</a:t>
             </a:r>
             <a:r>
-              <a:rPr lang="en-IN" dirty="0">
+              <a:rPr lang="en-IN" sz="1600" i="1" dirty="0">
                 <a:solidFill>
                   <a:schemeClr val="bg1">
                     <a:lumMod val="95000"/>
@@ -19527,7 +19634,7 @@
               <a:t>, </a:t>
             </a:r>
             <a:r>
-              <a:rPr lang="en-IN" dirty="0" err="1">
+              <a:rPr lang="en-IN" sz="1600" i="1" dirty="0" err="1">
                 <a:solidFill>
                   <a:schemeClr val="bg1">
                     <a:lumMod val="95000"/>
@@ -19537,7 +19644,7 @@
               <a:t>HarmBench</a:t>
             </a:r>
             <a:r>
-              <a:rPr lang="en-IN" dirty="0">
+              <a:rPr lang="en-IN" sz="1600" i="1" dirty="0">
                 <a:solidFill>
                   <a:schemeClr val="bg1">
                     <a:lumMod val="95000"/>
@@ -19547,7 +19654,7 @@
               <a:t>, Lakera Gandalf</a:t>
             </a:r>
             <a:br>
-              <a:rPr lang="en-IN" dirty="0">
+              <a:rPr lang="en-IN" sz="1600" i="1" dirty="0">
                 <a:solidFill>
                   <a:schemeClr val="bg1">
                     <a:lumMod val="95000"/>
@@ -19556,7 +19663,7 @@
               </a:rPr>
             </a:br>
             <a:r>
-              <a:rPr lang="en-IN" b="1" dirty="0">
+              <a:rPr lang="en-IN" sz="1600" b="1" i="1" dirty="0">
                 <a:solidFill>
                   <a:schemeClr val="bg1">
                     <a:lumMod val="95000"/>
@@ -19566,7 +19673,7 @@
               <a:t>Integrity &amp; Standards:</a:t>
             </a:r>
             <a:r>
-              <a:rPr lang="en-IN" dirty="0">
+              <a:rPr lang="en-IN" sz="1600" i="1" dirty="0">
                 <a:solidFill>
                   <a:schemeClr val="bg1">
                     <a:lumMod val="95000"/>

--- a/Team Teserract.pptx
+++ b/Team Teserract.pptx
@@ -13530,7 +13530,7 @@
                 <a:cs typeface="Montserrat"/>
                 <a:sym typeface="Montserrat"/>
               </a:rPr>
-              <a:t>~BEYOND THE PROBLEM STATEMENTS</a:t>
+              <a:t>~BEYOND THE PROBLEM STATEMENT</a:t>
             </a:r>
           </a:p>
           <a:p>
